--- a/soutenance/Presentation_Groupe9.pptx
+++ b/soutenance/Presentation_Groupe9.pptx
@@ -11726,7 +11726,7 @@
                 <a:ea typeface="Calibri" pitchFamily="34" charset="-122"/>
                 <a:cs typeface="Calibri" pitchFamily="34" charset="-120"/>
               </a:rPr>
-              <a:t>143 s</a:t>
+              <a:t>123 s</a:t>
             </a:r>
             <a:endParaRPr lang="en-US" sz="2100" dirty="0"/>
           </a:p>

--- a/soutenance/Presentation_Groupe9.pptx
+++ b/soutenance/Presentation_Groupe9.pptx
@@ -11502,7 +11502,7 @@
                 <a:ea typeface="Calibri" pitchFamily="34" charset="-122"/>
                 <a:cs typeface="Calibri" pitchFamily="34" charset="-120"/>
               </a:rPr>
-              <a:t>Seize cas isolés couvrant les frontières et les règles métier.</a:t>
+              <a:t>Vingt cas isolés couvrant les frontières et les règles métier.</a:t>
             </a:r>
             <a:endParaRPr lang="en-US" sz="1150" dirty="0"/>
           </a:p>
@@ -11614,7 +11614,7 @@
                 <a:ea typeface="Calibri" pitchFamily="34" charset="-122"/>
                 <a:cs typeface="Calibri" pitchFamily="34" charset="-120"/>
               </a:rPr>
-              <a:t>16 / 16</a:t>
+              <a:t>20 / 20</a:t>
             </a:r>
             <a:endParaRPr lang="en-US" sz="2100" dirty="0"/>
           </a:p>
@@ -11726,7 +11726,7 @@
                 <a:ea typeface="Calibri" pitchFamily="34" charset="-122"/>
                 <a:cs typeface="Calibri" pitchFamily="34" charset="-120"/>
               </a:rPr>
-              <a:t>123 s</a:t>
+              <a:t>96 s</a:t>
             </a:r>
             <a:endParaRPr lang="en-US" sz="2100" dirty="0"/>
           </a:p>

--- a/soutenance/Presentation_Groupe9.pptx
+++ b/soutenance/Presentation_Groupe9.pptx
@@ -9470,7 +9470,7 @@
                 <a:ea typeface="Calibri" pitchFamily="34" charset="-122"/>
                 <a:cs typeface="Calibri" pitchFamily="34" charset="-120"/>
               </a:rPr>
-              <a:t>cache, persist MEMORY_AND_DISK_SER, broadcast des marchands, unpersist dans un finally.</a:t>
+              <a:t>cache, persist MEMORY_AND_DISK_SER, broadcast des trois référentiels, exécution adaptative, unpersist dans un finally.</a:t>
             </a:r>
             <a:endParaRPr lang="en-US" sz="1200" dirty="0"/>
           </a:p>
@@ -11726,7 +11726,7 @@
                 <a:ea typeface="Calibri" pitchFamily="34" charset="-122"/>
                 <a:cs typeface="Calibri" pitchFamily="34" charset="-120"/>
               </a:rPr>
-              <a:t>96 s</a:t>
+              <a:t>108 s</a:t>
             </a:r>
             <a:endParaRPr lang="en-US" sz="2100" dirty="0"/>
           </a:p>
